--- a/manuscript/bmj_figures_ja.pptx
+++ b/manuscript/bmj_figures_ja.pptx
@@ -342,7 +342,7 @@
           <a:p>
             <a:fld id="{C1FF6DA9-008F-8B48-92A6-B652298478BF}" type="slidenum">
               <a:rPr lang="en-US" smtClean="0"/>
-              <a:t>‹#›</a:t>
+              <a:t>#</a:t>
             </a:fld>
             <a:endParaRPr lang="en-US"/>
           </a:p>
@@ -512,7 +512,7 @@
           <a:p>
             <a:fld id="{C1FF6DA9-008F-8B48-92A6-B652298478BF}" type="slidenum">
               <a:rPr lang="en-US" smtClean="0"/>
-              <a:t>‹#›</a:t>
+              <a:t>#</a:t>
             </a:fld>
             <a:endParaRPr lang="en-US"/>
           </a:p>
@@ -692,7 +692,7 @@
           <a:p>
             <a:fld id="{C1FF6DA9-008F-8B48-92A6-B652298478BF}" type="slidenum">
               <a:rPr lang="en-US" smtClean="0"/>
-              <a:t>‹#›</a:t>
+              <a:t>#</a:t>
             </a:fld>
             <a:endParaRPr lang="en-US"/>
           </a:p>
@@ -862,7 +862,7 @@
           <a:p>
             <a:fld id="{C1FF6DA9-008F-8B48-92A6-B652298478BF}" type="slidenum">
               <a:rPr lang="en-US" smtClean="0"/>
-              <a:t>‹#›</a:t>
+              <a:t>#</a:t>
             </a:fld>
             <a:endParaRPr lang="en-US"/>
           </a:p>
@@ -1108,7 +1108,7 @@
           <a:p>
             <a:fld id="{C1FF6DA9-008F-8B48-92A6-B652298478BF}" type="slidenum">
               <a:rPr lang="en-US" smtClean="0"/>
-              <a:t>‹#›</a:t>
+              <a:t>#</a:t>
             </a:fld>
             <a:endParaRPr lang="en-US"/>
           </a:p>
@@ -1396,7 +1396,7 @@
           <a:p>
             <a:fld id="{C1FF6DA9-008F-8B48-92A6-B652298478BF}" type="slidenum">
               <a:rPr lang="en-US" smtClean="0"/>
-              <a:t>‹#›</a:t>
+              <a:t>#</a:t>
             </a:fld>
             <a:endParaRPr lang="en-US"/>
           </a:p>
@@ -1818,7 +1818,7 @@
           <a:p>
             <a:fld id="{C1FF6DA9-008F-8B48-92A6-B652298478BF}" type="slidenum">
               <a:rPr lang="en-US" smtClean="0"/>
-              <a:t>‹#›</a:t>
+              <a:t>#</a:t>
             </a:fld>
             <a:endParaRPr lang="en-US"/>
           </a:p>
@@ -1936,7 +1936,7 @@
           <a:p>
             <a:fld id="{C1FF6DA9-008F-8B48-92A6-B652298478BF}" type="slidenum">
               <a:rPr lang="en-US" smtClean="0"/>
-              <a:t>‹#›</a:t>
+              <a:t>#</a:t>
             </a:fld>
             <a:endParaRPr lang="en-US"/>
           </a:p>
@@ -2031,7 +2031,7 @@
           <a:p>
             <a:fld id="{C1FF6DA9-008F-8B48-92A6-B652298478BF}" type="slidenum">
               <a:rPr lang="en-US" smtClean="0"/>
-              <a:t>‹#›</a:t>
+              <a:t>#</a:t>
             </a:fld>
             <a:endParaRPr lang="en-US"/>
           </a:p>
@@ -2308,7 +2308,7 @@
           <a:p>
             <a:fld id="{C1FF6DA9-008F-8B48-92A6-B652298478BF}" type="slidenum">
               <a:rPr lang="en-US" smtClean="0"/>
-              <a:t>‹#›</a:t>
+              <a:t>#</a:t>
             </a:fld>
             <a:endParaRPr lang="en-US"/>
           </a:p>
@@ -2561,7 +2561,7 @@
           <a:p>
             <a:fld id="{C1FF6DA9-008F-8B48-92A6-B652298478BF}" type="slidenum">
               <a:rPr lang="en-US" smtClean="0"/>
-              <a:t>‹#›</a:t>
+              <a:t>#</a:t>
             </a:fld>
             <a:endParaRPr lang="en-US"/>
           </a:p>
@@ -2810,7 +2810,7 @@
           <a:p>
             <a:fld id="{C1FF6DA9-008F-8B48-92A6-B652298478BF}" type="slidenum">
               <a:rPr lang="en-US" smtClean="0"/>
-              <a:t>‹#›</a:t>
+              <a:t>#</a:t>
             </a:fld>
             <a:endParaRPr lang="en-US"/>
           </a:p>
@@ -2860,7 +2860,7 @@
           <a:spcPct val="20000"/>
         </a:spcBef>
         <a:buFont typeface="Arial"/>
-        <a:buChar char="•"/>
+        <a:buChar char="*"/>
         <a:defRPr sz="3200" kern="1200">
           <a:solidFill>
             <a:schemeClr val="tx1"/>
@@ -2875,7 +2875,7 @@
           <a:spcPct val="20000"/>
         </a:spcBef>
         <a:buFont typeface="Arial"/>
-        <a:buChar char="–"/>
+        <a:buChar char="-"/>
         <a:defRPr sz="2800" kern="1200">
           <a:solidFill>
             <a:schemeClr val="tx1"/>
@@ -2890,7 +2890,7 @@
           <a:spcPct val="20000"/>
         </a:spcBef>
         <a:buFont typeface="Arial"/>
-        <a:buChar char="•"/>
+        <a:buChar char="*"/>
         <a:defRPr sz="2400" kern="1200">
           <a:solidFill>
             <a:schemeClr val="tx1"/>
@@ -2905,7 +2905,7 @@
           <a:spcPct val="20000"/>
         </a:spcBef>
         <a:buFont typeface="Arial"/>
-        <a:buChar char="–"/>
+        <a:buChar char="-"/>
         <a:defRPr sz="2000" kern="1200">
           <a:solidFill>
             <a:schemeClr val="tx1"/>
@@ -2920,7 +2920,7 @@
           <a:spcPct val="20000"/>
         </a:spcBef>
         <a:buFont typeface="Arial"/>
-        <a:buChar char="»"/>
+        <a:buChar char="&gt;&gt;"/>
         <a:defRPr sz="2000" kern="1200">
           <a:solidFill>
             <a:schemeClr val="tx1"/>
@@ -2935,7 +2935,7 @@
           <a:spcPct val="20000"/>
         </a:spcBef>
         <a:buFont typeface="Arial"/>
-        <a:buChar char="•"/>
+        <a:buChar char="*"/>
         <a:defRPr sz="2000" kern="1200">
           <a:solidFill>
             <a:schemeClr val="tx1"/>
@@ -2950,7 +2950,7 @@
           <a:spcPct val="20000"/>
         </a:spcBef>
         <a:buFont typeface="Arial"/>
-        <a:buChar char="•"/>
+        <a:buChar char="*"/>
         <a:defRPr sz="2000" kern="1200">
           <a:solidFill>
             <a:schemeClr val="tx1"/>
@@ -2965,7 +2965,7 @@
           <a:spcPct val="20000"/>
         </a:spcBef>
         <a:buFont typeface="Arial"/>
-        <a:buChar char="•"/>
+        <a:buChar char="*"/>
         <a:defRPr sz="2000" kern="1200">
           <a:solidFill>
             <a:schemeClr val="tx1"/>
@@ -2980,7 +2980,7 @@
           <a:spcPct val="20000"/>
         </a:spcBef>
         <a:buFont typeface="Arial"/>
-        <a:buChar char="•"/>
+        <a:buChar char="*"/>
         <a:defRPr sz="2000" kern="1200">
           <a:solidFill>
             <a:schemeClr val="tx1"/>
@@ -3481,7 +3481,7 @@
                         </a:defRPr>
                       </a:pPr>
                       <a:r>
-                        <a:t>−0.946</a:t>
+                        <a:t>-0.946</a:t>
                       </a:r>
                     </a:p>
                   </a:txBody>
@@ -3599,7 +3599,7 @@
                         </a:defRPr>
                       </a:pPr>
                       <a:r>
-                        <a:t>−0.947</a:t>
+                        <a:t>-0.947</a:t>
                       </a:r>
                     </a:p>
                   </a:txBody>
@@ -3705,7 +3705,7 @@
                         </a:defRPr>
                       </a:pPr>
                       <a:r>
-                        <a:t>−0.945</a:t>
+                        <a:t>-0.945</a:t>
                       </a:r>
                     </a:p>
                   </a:txBody>
@@ -3799,7 +3799,7 @@
                         </a:defRPr>
                       </a:pPr>
                       <a:r>
-                        <a:t>−4</a:t>
+                        <a:t>-4</a:t>
                       </a:r>
                     </a:p>
                   </a:txBody>
@@ -3823,7 +3823,7 @@
                         </a:defRPr>
                       </a:pPr>
                       <a:r>
-                        <a:t>−0.959</a:t>
+                        <a:t>-0.959</a:t>
                       </a:r>
                     </a:p>
                   </a:txBody>
@@ -3929,7 +3929,7 @@
                         </a:defRPr>
                       </a:pPr>
                       <a:r>
-                        <a:t>−0.973</a:t>
+                        <a:t>-0.973</a:t>
                       </a:r>
                     </a:p>
                   </a:txBody>
@@ -4047,7 +4047,7 @@
                         </a:defRPr>
                       </a:pPr>
                       <a:r>
-                        <a:t>−0.988</a:t>
+                        <a:t>-0.988</a:t>
                       </a:r>
                     </a:p>
                   </a:txBody>
@@ -4153,7 +4153,7 @@
                         </a:defRPr>
                       </a:pPr>
                       <a:r>
-                        <a:t>−0.909</a:t>
+                        <a:t>-0.909</a:t>
                       </a:r>
                     </a:p>
                   </a:txBody>
@@ -4247,7 +4247,7 @@
                         </a:defRPr>
                       </a:pPr>
                       <a:r>
-                        <a:t>−3</a:t>
+                        <a:t>-3</a:t>
                       </a:r>
                     </a:p>
                   </a:txBody>
@@ -4271,7 +4271,7 @@
                         </a:defRPr>
                       </a:pPr>
                       <a:r>
-                        <a:t>−0.941</a:t>
+                        <a:t>-0.941</a:t>
                       </a:r>
                     </a:p>
                   </a:txBody>
@@ -4377,7 +4377,7 @@
                         </a:defRPr>
                       </a:pPr>
                       <a:r>
-                        <a:t>−0.981</a:t>
+                        <a:t>-0.981</a:t>
                       </a:r>
                     </a:p>
                   </a:txBody>
@@ -4495,7 +4495,7 @@
                         </a:defRPr>
                       </a:pPr>
                       <a:r>
-                        <a:t>−0.969</a:t>
+                        <a:t>-0.969</a:t>
                       </a:r>
                     </a:p>
                   </a:txBody>
@@ -4541,7 +4541,7 @@
               </a:defRPr>
             </a:pPr>
             <a:r>
-              <a:t>トレンド除去後の事故系列とアウトカム系列のラグ−8〜+8年における相互相関。正のラグ＝事故件数の変化がアウトカムの変化に先行。</a:t>
+              <a:t>トレンド除去後の事故系列とアウトカム系列のラグ-8〜+8年における相互相関。正のラグ＝事故件数の変化がアウトカムの変化に先行。</a:t>
             </a:r>
           </a:p>
         </p:txBody>
@@ -6080,7 +6080,7 @@
                         </a:defRPr>
                       </a:pPr>
                       <a:r>
-                        <a:t>−0.1</a:t>
+                        <a:t>-0.1</a:t>
                       </a:r>
                     </a:p>
                   </a:txBody>
@@ -6414,7 +6414,7 @@
                         </a:defRPr>
                       </a:pPr>
                       <a:r>
-                        <a:t>−260</a:t>
+                        <a:t>-260</a:t>
                       </a:r>
                     </a:p>
                   </a:txBody>
@@ -6434,7 +6434,7 @@
                         </a:defRPr>
                       </a:pPr>
                       <a:r>
-                        <a:t>−350</a:t>
+                        <a:t>-350</a:t>
                       </a:r>
                     </a:p>
                   </a:txBody>
@@ -6524,7 +6524,7 @@
                         </a:defRPr>
                       </a:pPr>
                       <a:r>
-                        <a:t>−65</a:t>
+                        <a:t>-65</a:t>
                       </a:r>
                     </a:p>
                   </a:txBody>
@@ -6614,7 +6614,7 @@
                         </a:defRPr>
                       </a:pPr>
                       <a:r>
-                        <a:t>−256</a:t>
+                        <a:t>-256</a:t>
                       </a:r>
                     </a:p>
                   </a:txBody>
@@ -6704,7 +6704,7 @@
                         </a:defRPr>
                       </a:pPr>
                       <a:r>
-                        <a:t>−188</a:t>
+                        <a:t>-188</a:t>
                       </a:r>
                     </a:p>
                   </a:txBody>
@@ -6728,7 +6728,7 @@
                         </a:defRPr>
                       </a:pPr>
                       <a:r>
-                        <a:t>−5</a:t>
+                        <a:t>-5</a:t>
                       </a:r>
                     </a:p>
                   </a:txBody>
@@ -6794,7 +6794,7 @@
                         </a:defRPr>
                       </a:pPr>
                       <a:r>
-                        <a:t>−34</a:t>
+                        <a:t>-34</a:t>
                       </a:r>
                     </a:p>
                   </a:txBody>
@@ -6954,7 +6954,7 @@
                         </a:defRPr>
                       </a:pPr>
                       <a:r>
-                        <a:t>−16</a:t>
+                        <a:t>-16</a:t>
                       </a:r>
                     </a:p>
                   </a:txBody>
@@ -6974,7 +6974,7 @@
                         </a:defRPr>
                       </a:pPr>
                       <a:r>
-                        <a:t>−97</a:t>
+                        <a:t>-97</a:t>
                       </a:r>
                     </a:p>
                   </a:txBody>
@@ -6994,7 +6994,7 @@
                         </a:defRPr>
                       </a:pPr>
                       <a:r>
-                        <a:t>−5</a:t>
+                        <a:t>-5</a:t>
                       </a:r>
                     </a:p>
                   </a:txBody>
@@ -7786,7 +7786,7 @@
               </a:defRPr>
             </a:pPr>
             <a:r>
-              <a:t>行：診療科、列：事故定義×アウトカムの組み合わせ。濃い色はより強い逆相関を示す。正のラグ値は事故件数の変化がアウトカムの変化に先行することを示す。</a:t>
+              <a:t>行：診療科、列：事故定義*アウトカムの組み合わせ。濃い色はより強い逆相関を示す。正のラグ値は事故件数の変化がアウトカムの変化に先行することを示す。</a:t>
             </a:r>
           </a:p>
         </p:txBody>
@@ -8187,10 +8187,10 @@
         <a:latin typeface="Calibri"/>
         <a:ea typeface=""/>
         <a:cs typeface=""/>
-        <a:font script="Jpan" typeface="ＭＳ Ｐゴシック"/>
-        <a:font script="Hang" typeface="맑은 고딕"/>
-        <a:font script="Hans" typeface="宋体"/>
-        <a:font script="Hant" typeface="新細明體"/>
+        <a:font script="Jpan" typeface="MS PGothic"/>
+        <a:font script="Hang" typeface="Malgun Gothic"/>
+        <a:font script="Hans" typeface="SimSun"/>
+        <a:font script="Hant" typeface="PMingLiU"/>
         <a:font script="Arab" typeface="Times New Roman"/>
         <a:font script="Hebr" typeface="Times New Roman"/>
         <a:font script="Thai" typeface="Angsana New"/>
@@ -8222,10 +8222,10 @@
         <a:latin typeface="Calibri"/>
         <a:ea typeface=""/>
         <a:cs typeface=""/>
-        <a:font script="Jpan" typeface="ＭＳ Ｐゴシック"/>
-        <a:font script="Hang" typeface="맑은 고딕"/>
-        <a:font script="Hans" typeface="宋体"/>
-        <a:font script="Hant" typeface="新細明體"/>
+        <a:font script="Jpan" typeface="MS PGothic"/>
+        <a:font script="Hang" typeface="Malgun Gothic"/>
+        <a:font script="Hans" typeface="SimSun"/>
+        <a:font script="Hant" typeface="PMingLiU"/>
         <a:font script="Arab" typeface="Arial"/>
         <a:font script="Hebr" typeface="Arial"/>
         <a:font script="Thai" typeface="Cordia New"/>
